--- a/001 Типы языка Си.pptx
+++ b/001 Типы языка Си.pptx
@@ -154,6 +154,11 @@
       </a:defRPr>
     </a:lvl9pPr>
   </p:defaultTextStyle>
+  <p:extLst>
+    <p:ext uri="{EFAFB233-063F-42B5-8137-9DF3F51BA10A}">
+      <p15:sldGuideLst xmlns:p15="http://schemas.microsoft.com/office/powerpoint/2012/main"/>
+    </p:ext>
+  </p:extLst>
 </p:presentation>
 </file>
 
@@ -239,7 +244,7 @@
           <a:p>
             <a:fld id="{8E55B237-282A-413C-93C7-161EFC0FDF85}" type="datetimeFigureOut">
               <a:rPr lang="ru-RU" smtClean="0"/>
-              <a:t>02.09.2026</a:t>
+              <a:t>03.09.2026</a:t>
             </a:fld>
             <a:endParaRPr lang="ru-RU"/>
           </a:p>
@@ -992,7 +997,7 @@
           <a:p>
             <a:fld id="{78E65DD7-7B4A-47A4-8B61-4938D03CC77B}" type="datetimeFigureOut">
               <a:rPr lang="ru-RU" smtClean="0"/>
-              <a:t>30.08.2026</a:t>
+              <a:t>03.09.2026</a:t>
             </a:fld>
             <a:endParaRPr lang="ru-RU"/>
           </a:p>
@@ -1192,7 +1197,7 @@
           <a:p>
             <a:fld id="{78E65DD7-7B4A-47A4-8B61-4938D03CC77B}" type="datetimeFigureOut">
               <a:rPr lang="ru-RU" smtClean="0"/>
-              <a:t>30.08.2026</a:t>
+              <a:t>03.09.2026</a:t>
             </a:fld>
             <a:endParaRPr lang="ru-RU"/>
           </a:p>
@@ -1402,7 +1407,7 @@
           <a:p>
             <a:fld id="{78E65DD7-7B4A-47A4-8B61-4938D03CC77B}" type="datetimeFigureOut">
               <a:rPr lang="ru-RU" smtClean="0"/>
-              <a:t>30.08.2026</a:t>
+              <a:t>03.09.2026</a:t>
             </a:fld>
             <a:endParaRPr lang="ru-RU"/>
           </a:p>
@@ -1602,7 +1607,7 @@
           <a:p>
             <a:fld id="{78E65DD7-7B4A-47A4-8B61-4938D03CC77B}" type="datetimeFigureOut">
               <a:rPr lang="ru-RU" smtClean="0"/>
-              <a:t>30.08.2026</a:t>
+              <a:t>03.09.2026</a:t>
             </a:fld>
             <a:endParaRPr lang="ru-RU"/>
           </a:p>
@@ -1878,7 +1883,7 @@
           <a:p>
             <a:fld id="{78E65DD7-7B4A-47A4-8B61-4938D03CC77B}" type="datetimeFigureOut">
               <a:rPr lang="ru-RU" smtClean="0"/>
-              <a:t>30.08.2026</a:t>
+              <a:t>03.09.2026</a:t>
             </a:fld>
             <a:endParaRPr lang="ru-RU"/>
           </a:p>
@@ -2146,7 +2151,7 @@
           <a:p>
             <a:fld id="{78E65DD7-7B4A-47A4-8B61-4938D03CC77B}" type="datetimeFigureOut">
               <a:rPr lang="ru-RU" smtClean="0"/>
-              <a:t>30.08.2026</a:t>
+              <a:t>03.09.2026</a:t>
             </a:fld>
             <a:endParaRPr lang="ru-RU"/>
           </a:p>
@@ -2561,7 +2566,7 @@
           <a:p>
             <a:fld id="{78E65DD7-7B4A-47A4-8B61-4938D03CC77B}" type="datetimeFigureOut">
               <a:rPr lang="ru-RU" smtClean="0"/>
-              <a:t>30.08.2026</a:t>
+              <a:t>03.09.2026</a:t>
             </a:fld>
             <a:endParaRPr lang="ru-RU"/>
           </a:p>
@@ -2703,7 +2708,7 @@
           <a:p>
             <a:fld id="{78E65DD7-7B4A-47A4-8B61-4938D03CC77B}" type="datetimeFigureOut">
               <a:rPr lang="ru-RU" smtClean="0"/>
-              <a:t>30.08.2026</a:t>
+              <a:t>03.09.2026</a:t>
             </a:fld>
             <a:endParaRPr lang="ru-RU"/>
           </a:p>
@@ -2816,7 +2821,7 @@
           <a:p>
             <a:fld id="{78E65DD7-7B4A-47A4-8B61-4938D03CC77B}" type="datetimeFigureOut">
               <a:rPr lang="ru-RU" smtClean="0"/>
-              <a:t>30.08.2026</a:t>
+              <a:t>03.09.2026</a:t>
             </a:fld>
             <a:endParaRPr lang="ru-RU"/>
           </a:p>
@@ -3129,7 +3134,7 @@
           <a:p>
             <a:fld id="{78E65DD7-7B4A-47A4-8B61-4938D03CC77B}" type="datetimeFigureOut">
               <a:rPr lang="ru-RU" smtClean="0"/>
-              <a:t>30.08.2026</a:t>
+              <a:t>03.09.2026</a:t>
             </a:fld>
             <a:endParaRPr lang="ru-RU"/>
           </a:p>
@@ -3418,7 +3423,7 @@
           <a:p>
             <a:fld id="{78E65DD7-7B4A-47A4-8B61-4938D03CC77B}" type="datetimeFigureOut">
               <a:rPr lang="ru-RU" smtClean="0"/>
-              <a:t>30.08.2026</a:t>
+              <a:t>03.09.2026</a:t>
             </a:fld>
             <a:endParaRPr lang="ru-RU"/>
           </a:p>
@@ -3661,7 +3666,7 @@
           <a:p>
             <a:fld id="{78E65DD7-7B4A-47A4-8B61-4938D03CC77B}" type="datetimeFigureOut">
               <a:rPr lang="ru-RU" smtClean="0"/>
-              <a:t>30.08.2026</a:t>
+              <a:t>03.09.2026</a:t>
             </a:fld>
             <a:endParaRPr lang="ru-RU"/>
           </a:p>
@@ -37713,8 +37718,12 @@
           <a:lstStyle/>
           <a:p>
             <a:r>
+              <a:rPr lang="ru-RU"/>
+              <a:t>Типы языка </a:t>
+            </a:r>
+            <a:r>
               <a:rPr lang="ru-RU" dirty="0"/>
-              <a:t>Типы в языке Си</a:t>
+              <a:t>Си</a:t>
             </a:r>
           </a:p>
         </p:txBody>
